--- a/projects/测试DEMO/最终文档/ppt_slides/slide_02.pptx
+++ b/projects/测试DEMO/最终文档/ppt_slides/slide_02.pptx
@@ -105,100 +105,6 @@
     </a:lvl9pPr>
   </p:defaultTextStyle>
 </p:presentation>
-</file>
-
-<file path=ppt/charts/chart1.xml><?xml version="1.0" encoding="utf-8"?>
-<c:chartSpace xmlns:c="http://schemas.openxmlformats.org/drawingml/2006/chart" xmlns:a="http://schemas.openxmlformats.org/drawingml/2006/main" xmlns:r="http://schemas.openxmlformats.org/officeDocument/2006/relationships">
-  <c:date1904 val="0"/>
-  <c:roundedCorners val="0"/>
-  <c:chart>
-    <c:autoTitleDeleted val="0"/>
-    <c:plotArea>
-      <c:layout/>
-      <c:doughnutChart>
-        <c:varyColors val="1"/>
-        <c:ser>
-          <c:idx val="0"/>
-          <c:order val="0"/>
-          <c:tx>
-            <c:strRef>
-              <c:f>Sheet1!$B$1</c:f>
-              <c:strCache>
-                <c:ptCount val="1"/>
-                <c:pt idx="0">
-                  <c:v>Series 1</c:v>
-                </c:pt>
-              </c:strCache>
-            </c:strRef>
-          </c:tx>
-          <c:dPt>
-            <c:idx val="0"/>
-            <c:spPr>
-              <a:solidFill>
-                <a:srgbClr val="F38B00"/>
-              </a:solidFill>
-            </c:spPr>
-          </c:dPt>
-          <c:dPt>
-            <c:idx val="1"/>
-            <c:spPr>
-              <a:solidFill>
-                <a:srgbClr val="787878"/>
-              </a:solidFill>
-            </c:spPr>
-          </c:dPt>
-          <c:cat>
-            <c:strRef>
-              <c:f>Sheet1!$A$2:$A$3</c:f>
-              <c:strCache>
-                <c:ptCount val="2"/>
-                <c:pt idx="0">
-                  <c:v>虚构字段</c:v>
-                </c:pt>
-                <c:pt idx="1">
-                  <c:v>其他错误</c:v>
-                </c:pt>
-              </c:strCache>
-            </c:strRef>
-          </c:cat>
-          <c:val>
-            <c:numRef>
-              <c:f>Sheet1!$B$2:$B$3</c:f>
-              <c:numCache>
-                <c:formatCode>General</c:formatCode>
-                <c:ptCount val="2"/>
-                <c:pt idx="0">
-                  <c:v>50</c:v>
-                </c:pt>
-                <c:pt idx="1">
-                  <c:v>50</c:v>
-                </c:pt>
-              </c:numCache>
-            </c:numRef>
-          </c:val>
-        </c:ser>
-        <c:firstSliceAng val="0"/>
-        <c:holeSize val="50"/>
-      </c:doughnutChart>
-    </c:plotArea>
-    <c:plotVisOnly val="1"/>
-    <c:dispBlanksAs val="gap"/>
-    <c:showDLblsOverMax val="0"/>
-  </c:chart>
-  <c:txPr>
-    <a:bodyPr/>
-    <a:lstStyle/>
-    <a:p>
-      <a:pPr>
-        <a:defRPr sz="1800"/>
-      </a:pPr>
-      <a:endParaRPr/>
-    </a:p>
-  </c:txPr>
-  <c:externalData r:id="rId1">
-    <c:autoUpdate val="0"/>
-  </c:externalData>
-</c:chartSpace>
 </file>
 
 <file path=ppt/slideLayouts/slideLayout1.xml><?xml version="1.0" encoding="utf-8"?>
@@ -3175,14 +3081,6 @@
 <file path=ppt/slides/slide1.xml><?xml version="1.0" encoding="utf-8"?>
 <p:sld xmlns:a="http://schemas.openxmlformats.org/drawingml/2006/main" xmlns:p="http://schemas.openxmlformats.org/presentationml/2006/main" xmlns:r="http://schemas.openxmlformats.org/officeDocument/2006/relationships">
   <p:cSld>
-    <p:bg>
-      <p:bgPr>
-        <a:solidFill>
-          <a:srgbClr val="2B2B2B"/>
-        </a:solidFill>
-        <a:effectLst/>
-      </p:bgPr>
-    </p:bg>
     <p:spTree>
       <p:nvGrpSpPr>
         <p:cNvPr id="1" name=""/>
@@ -3213,15 +3111,15 @@
           <a:lstStyle/>
           <a:p>
             <a:pPr>
-              <a:defRPr sz="2800" b="1">
+              <a:defRPr sz="3200" b="1">
                 <a:solidFill>
-                  <a:srgbClr val="FFFFFF"/>
+                  <a:srgbClr val="1A365D"/>
                 </a:solidFill>
                 <a:latin typeface="Microsoft YaHei"/>
               </a:defRPr>
             </a:pPr>
             <a:r>
-              <a:t>中等难度：陷入“幻觉”与语法泥潭</a:t>
+              <a:t>中等场景瓶颈：AI “幻觉”引发崩溃</a:t>
             </a:r>
           </a:p>
         </p:txBody>
@@ -3234,8 +3132,8 @@
         </p:nvSpPr>
         <p:spPr>
           <a:xfrm>
-            <a:off x="457200" y="914400"/>
-            <a:ext cx="9144000" cy="548640"/>
+            <a:off x="457200" y="1005840"/>
+            <a:ext cx="9144000" cy="457200"/>
           </a:xfrm>
           <a:prstGeom prst="rect">
             <a:avLst/>
@@ -3249,15 +3147,15 @@
           <a:lstStyle/>
           <a:p>
             <a:pPr>
-              <a:defRPr sz="2000" b="1">
+              <a:defRPr sz="1800">
                 <a:solidFill>
-                  <a:srgbClr val="FFFFFF"/>
+                  <a:srgbClr val="555555"/>
                 </a:solidFill>
                 <a:latin typeface="Microsoft YaHei"/>
               </a:defRPr>
             </a:pPr>
             <a:r>
-              <a:t>案例B — 采购配额维护（函数组开发）</a:t>
+              <a:t>采购配额维护（中等复杂度）开发验证</a:t>
             </a:r>
           </a:p>
         </p:txBody>
@@ -3270,8 +3168,8 @@
         </p:nvSpPr>
         <p:spPr>
           <a:xfrm>
-            <a:off x="1828800" y="1645920"/>
-            <a:ext cx="2286000" cy="365760"/>
+            <a:off x="457200" y="1645920"/>
+            <a:ext cx="548640" cy="548640"/>
           </a:xfrm>
           <a:prstGeom prst="rect">
             <a:avLst/>
@@ -3285,54 +3183,419 @@
           <a:lstStyle/>
           <a:p>
             <a:pPr algn="ctr">
-              <a:defRPr sz="1400" b="1">
+              <a:defRPr sz="2800">
                 <a:solidFill>
-                  <a:srgbClr val="FFFFFF"/>
+                  <a:srgbClr val="E53935"/>
                 </a:solidFill>
               </a:defRPr>
             </a:pPr>
             <a:r>
-              <a:t>错误分布饼图</a:t>
-            </a:r>
-          </a:p>
-        </p:txBody>
-      </p:sp>
-      <p:graphicFrame>
-        <p:nvGraphicFramePr>
-          <p:cNvPr id="5" name="Chart 4"/>
-          <p:cNvGraphicFramePr>
-            <a:graphicFrameLocks noGrp="1"/>
-          </p:cNvGraphicFramePr>
-          <p:nvPr/>
-        </p:nvGraphicFramePr>
-        <p:xfrm>
-          <a:off x="1828800" y="2103120"/>
-          <a:ext cx="2286000" cy="2286000"/>
-        </p:xfrm>
-        <a:graphic>
-          <a:graphicData uri="http://schemas.openxmlformats.org/drawingml/2006/chart">
-            <c:chart xmlns:c="http://schemas.openxmlformats.org/drawingml/2006/chart" r:id="rId2"/>
-          </a:graphicData>
-        </a:graphic>
-      </p:graphicFrame>
-      <p:sp>
-        <p:nvSpPr>
-          <p:cNvPr id="6" name="Isosceles Triangle 5"/>
-          <p:cNvSpPr/>
+              <a:t>🔗</a:t>
+            </a:r>
+          </a:p>
+        </p:txBody>
+      </p:sp>
+      <p:sp>
+        <p:nvSpPr>
+          <p:cNvPr id="5" name="TextBox 4"/>
+          <p:cNvSpPr txBox="1"/>
           <p:nvPr/>
         </p:nvSpPr>
         <p:spPr>
           <a:xfrm>
-            <a:off x="2788920" y="3017520"/>
-            <a:ext cx="365760" cy="320040"/>
+            <a:off x="1188720" y="1645920"/>
+            <a:ext cx="4114800" cy="365760"/>
           </a:xfrm>
-          <a:prstGeom prst="triangle">
+          <a:prstGeom prst="rect">
             <a:avLst/>
           </a:prstGeom>
           <a:noFill/>
-          <a:ln w="19050">
+        </p:spPr>
+        <p:txBody>
+          <a:bodyPr wrap="none">
+            <a:spAutoFit/>
+          </a:bodyPr>
+          <a:lstStyle/>
+          <a:p>
+            <a:pPr>
+              <a:defRPr sz="1800" b="1">
+                <a:latin typeface="Microsoft YaHei"/>
+              </a:defRPr>
+            </a:pPr>
+            <a:r>
+              <a:t>逻辑误区</a:t>
+            </a:r>
+          </a:p>
+        </p:txBody>
+      </p:sp>
+      <p:sp>
+        <p:nvSpPr>
+          <p:cNvPr id="6" name="TextBox 5"/>
+          <p:cNvSpPr txBox="1"/>
+          <p:nvPr/>
+        </p:nvSpPr>
+        <p:spPr>
+          <a:xfrm>
+            <a:off x="1188720" y="1965960"/>
+            <a:ext cx="4389120" cy="731520"/>
+          </a:xfrm>
+          <a:prstGeom prst="rect">
+            <a:avLst/>
+          </a:prstGeom>
+          <a:noFill/>
+        </p:spPr>
+        <p:txBody>
+          <a:bodyPr wrap="square">
+            <a:spAutoFit/>
+          </a:bodyPr>
+          <a:lstStyle/>
+          <a:p>
+            <a:pPr>
+              <a:defRPr sz="1400">
+                <a:solidFill>
+                  <a:srgbClr val="555555"/>
+                </a:solidFill>
+                <a:latin typeface="Microsoft YaHei"/>
+              </a:defRPr>
+            </a:pPr>
+            <a:r>
+              <a:t>Copilot 完全混淆业务概念（配额误作货源），代码完全不可用。</a:t>
+            </a:r>
+          </a:p>
+        </p:txBody>
+      </p:sp>
+      <p:sp>
+        <p:nvSpPr>
+          <p:cNvPr id="7" name="TextBox 6"/>
+          <p:cNvSpPr txBox="1"/>
+          <p:nvPr/>
+        </p:nvSpPr>
+        <p:spPr>
+          <a:xfrm>
+            <a:off x="457200" y="2834640"/>
+            <a:ext cx="548640" cy="548640"/>
+          </a:xfrm>
+          <a:prstGeom prst="rect">
+            <a:avLst/>
+          </a:prstGeom>
+          <a:noFill/>
+        </p:spPr>
+        <p:txBody>
+          <a:bodyPr wrap="none">
+            <a:spAutoFit/>
+          </a:bodyPr>
+          <a:lstStyle/>
+          <a:p>
+            <a:pPr algn="ctr">
+              <a:defRPr sz="2800">
+                <a:solidFill>
+                  <a:srgbClr val="E53935"/>
+                </a:solidFill>
+              </a:defRPr>
+            </a:pPr>
+            <a:r>
+              <a:t>⚠️</a:t>
+            </a:r>
+          </a:p>
+        </p:txBody>
+      </p:sp>
+      <p:sp>
+        <p:nvSpPr>
+          <p:cNvPr id="8" name="TextBox 7"/>
+          <p:cNvSpPr txBox="1"/>
+          <p:nvPr/>
+        </p:nvSpPr>
+        <p:spPr>
+          <a:xfrm>
+            <a:off x="1188720" y="2834640"/>
+            <a:ext cx="4114800" cy="365760"/>
+          </a:xfrm>
+          <a:prstGeom prst="rect">
+            <a:avLst/>
+          </a:prstGeom>
+          <a:noFill/>
+        </p:spPr>
+        <p:txBody>
+          <a:bodyPr wrap="none">
+            <a:spAutoFit/>
+          </a:bodyPr>
+          <a:lstStyle/>
+          <a:p>
+            <a:pPr>
+              <a:defRPr sz="1800" b="1">
+                <a:latin typeface="Microsoft YaHei"/>
+              </a:defRPr>
+            </a:pPr>
+            <a:r>
+              <a:t>幻觉严重</a:t>
+            </a:r>
+          </a:p>
+        </p:txBody>
+      </p:sp>
+      <p:sp>
+        <p:nvSpPr>
+          <p:cNvPr id="9" name="TextBox 8"/>
+          <p:cNvSpPr txBox="1"/>
+          <p:nvPr/>
+        </p:nvSpPr>
+        <p:spPr>
+          <a:xfrm>
+            <a:off x="1188720" y="3154680"/>
+            <a:ext cx="4389120" cy="731520"/>
+          </a:xfrm>
+          <a:prstGeom prst="rect">
+            <a:avLst/>
+          </a:prstGeom>
+          <a:noFill/>
+        </p:spPr>
+        <p:txBody>
+          <a:bodyPr wrap="square">
+            <a:spAutoFit/>
+          </a:bodyPr>
+          <a:lstStyle/>
+          <a:p>
+            <a:pPr>
+              <a:defRPr sz="1400">
+                <a:solidFill>
+                  <a:srgbClr val="555555"/>
+                </a:solidFill>
+                <a:latin typeface="Microsoft YaHei"/>
+              </a:defRPr>
+            </a:pPr>
+            <a:r>
+              <a:t>Claude Code 虚构字段比例高达 50%，导致 21 个连锁语法错误。</a:t>
+            </a:r>
+          </a:p>
+        </p:txBody>
+      </p:sp>
+      <p:sp>
+        <p:nvSpPr>
+          <p:cNvPr id="10" name="TextBox 9"/>
+          <p:cNvSpPr txBox="1"/>
+          <p:nvPr/>
+        </p:nvSpPr>
+        <p:spPr>
+          <a:xfrm>
+            <a:off x="457200" y="4023360"/>
+            <a:ext cx="548640" cy="548640"/>
+          </a:xfrm>
+          <a:prstGeom prst="rect">
+            <a:avLst/>
+          </a:prstGeom>
+          <a:noFill/>
+        </p:spPr>
+        <p:txBody>
+          <a:bodyPr wrap="none">
+            <a:spAutoFit/>
+          </a:bodyPr>
+          <a:lstStyle/>
+          <a:p>
+            <a:pPr algn="ctr">
+              <a:defRPr sz="2800">
+                <a:solidFill>
+                  <a:srgbClr val="E53935"/>
+                </a:solidFill>
+              </a:defRPr>
+            </a:pPr>
+            <a:r>
+              <a:t>🚫</a:t>
+            </a:r>
+          </a:p>
+        </p:txBody>
+      </p:sp>
+      <p:sp>
+        <p:nvSpPr>
+          <p:cNvPr id="11" name="TextBox 10"/>
+          <p:cNvSpPr txBox="1"/>
+          <p:nvPr/>
+        </p:nvSpPr>
+        <p:spPr>
+          <a:xfrm>
+            <a:off x="1188720" y="4023360"/>
+            <a:ext cx="4114800" cy="365760"/>
+          </a:xfrm>
+          <a:prstGeom prst="rect">
+            <a:avLst/>
+          </a:prstGeom>
+          <a:noFill/>
+        </p:spPr>
+        <p:txBody>
+          <a:bodyPr wrap="none">
+            <a:spAutoFit/>
+          </a:bodyPr>
+          <a:lstStyle/>
+          <a:p>
+            <a:pPr>
+              <a:defRPr sz="1800" b="1">
+                <a:latin typeface="Microsoft YaHei"/>
+              </a:defRPr>
+            </a:pPr>
+            <a:r>
+              <a:t>效率归零</a:t>
+            </a:r>
+          </a:p>
+        </p:txBody>
+      </p:sp>
+      <p:sp>
+        <p:nvSpPr>
+          <p:cNvPr id="12" name="TextBox 11"/>
+          <p:cNvSpPr txBox="1"/>
+          <p:nvPr/>
+        </p:nvSpPr>
+        <p:spPr>
+          <a:xfrm>
+            <a:off x="1188720" y="4343400"/>
+            <a:ext cx="4389120" cy="731520"/>
+          </a:xfrm>
+          <a:prstGeom prst="rect">
+            <a:avLst/>
+          </a:prstGeom>
+          <a:noFill/>
+        </p:spPr>
+        <p:txBody>
+          <a:bodyPr wrap="square">
+            <a:spAutoFit/>
+          </a:bodyPr>
+          <a:lstStyle/>
+          <a:p>
+            <a:pPr>
+              <a:defRPr sz="1400">
+                <a:solidFill>
+                  <a:srgbClr val="555555"/>
+                </a:solidFill>
+                <a:latin typeface="Microsoft YaHei"/>
+              </a:defRPr>
+            </a:pPr>
+            <a:r>
+              <a:t>AI 修复成本大于重写成本，整体效率对比手写无任何提升。</a:t>
+            </a:r>
+          </a:p>
+        </p:txBody>
+      </p:sp>
+      <p:sp>
+        <p:nvSpPr>
+          <p:cNvPr id="13" name="TextBox 12"/>
+          <p:cNvSpPr txBox="1"/>
+          <p:nvPr/>
+        </p:nvSpPr>
+        <p:spPr>
+          <a:xfrm>
+            <a:off x="457200" y="5212080"/>
+            <a:ext cx="548640" cy="548640"/>
+          </a:xfrm>
+          <a:prstGeom prst="rect">
+            <a:avLst/>
+          </a:prstGeom>
+          <a:noFill/>
+        </p:spPr>
+        <p:txBody>
+          <a:bodyPr wrap="none">
+            <a:spAutoFit/>
+          </a:bodyPr>
+          <a:lstStyle/>
+          <a:p>
+            <a:pPr algn="ctr">
+              <a:defRPr sz="2800">
+                <a:solidFill>
+                  <a:srgbClr val="E53935"/>
+                </a:solidFill>
+              </a:defRPr>
+            </a:pPr>
+            <a:r>
+              <a:t>⚠️</a:t>
+            </a:r>
+          </a:p>
+        </p:txBody>
+      </p:sp>
+      <p:sp>
+        <p:nvSpPr>
+          <p:cNvPr id="14" name="TextBox 13"/>
+          <p:cNvSpPr txBox="1"/>
+          <p:nvPr/>
+        </p:nvSpPr>
+        <p:spPr>
+          <a:xfrm>
+            <a:off x="1188720" y="5212080"/>
+            <a:ext cx="4114800" cy="365760"/>
+          </a:xfrm>
+          <a:prstGeom prst="rect">
+            <a:avLst/>
+          </a:prstGeom>
+          <a:noFill/>
+        </p:spPr>
+        <p:txBody>
+          <a:bodyPr wrap="none">
+            <a:spAutoFit/>
+          </a:bodyPr>
+          <a:lstStyle/>
+          <a:p>
+            <a:pPr>
+              <a:defRPr sz="1800" b="1">
+                <a:latin typeface="Microsoft YaHei"/>
+              </a:defRPr>
+            </a:pPr>
+            <a:r>
+              <a:t>规则缺失</a:t>
+            </a:r>
+          </a:p>
+        </p:txBody>
+      </p:sp>
+      <p:sp>
+        <p:nvSpPr>
+          <p:cNvPr id="15" name="TextBox 14"/>
+          <p:cNvSpPr txBox="1"/>
+          <p:nvPr/>
+        </p:nvSpPr>
+        <p:spPr>
+          <a:xfrm>
+            <a:off x="1188720" y="5532120"/>
+            <a:ext cx="4389120" cy="731520"/>
+          </a:xfrm>
+          <a:prstGeom prst="rect">
+            <a:avLst/>
+          </a:prstGeom>
+          <a:noFill/>
+        </p:spPr>
+        <p:txBody>
+          <a:bodyPr wrap="square">
+            <a:spAutoFit/>
+          </a:bodyPr>
+          <a:lstStyle/>
+          <a:p>
+            <a:pPr>
+              <a:defRPr sz="1400">
+                <a:solidFill>
+                  <a:srgbClr val="555555"/>
+                </a:solidFill>
+                <a:latin typeface="Microsoft YaHei"/>
+              </a:defRPr>
+            </a:pPr>
+            <a:r>
+              <a:t>AI 无法准确遵循 SAP 函数接口规范，直接忽略“优先 API”的指令。</a:t>
+            </a:r>
+          </a:p>
+        </p:txBody>
+      </p:sp>
+      <p:sp>
+        <p:nvSpPr>
+          <p:cNvPr id="16" name="Rounded Rectangle 15"/>
+          <p:cNvSpPr/>
+          <p:nvPr/>
+        </p:nvSpPr>
+        <p:spPr>
+          <a:xfrm>
+            <a:off x="6217920" y="1280160"/>
+            <a:ext cx="5486400" cy="1280160"/>
+          </a:xfrm>
+          <a:prstGeom prst="roundRect">
+            <a:avLst/>
+          </a:prstGeom>
+          <a:solidFill>
+            <a:srgbClr val="FFFFFF"/>
+          </a:solidFill>
+          <a:ln w="12700">
             <a:solidFill>
-              <a:srgbClr val="F38B00"/>
+              <a:srgbClr val="E0E0E0"/>
             </a:solidFill>
           </a:ln>
         </p:spPr>
@@ -3360,14 +3623,14 @@
       </p:sp>
       <p:sp>
         <p:nvSpPr>
-          <p:cNvPr id="7" name="TextBox 6"/>
+          <p:cNvPr id="17" name="TextBox 16"/>
           <p:cNvSpPr txBox="1"/>
           <p:nvPr/>
         </p:nvSpPr>
         <p:spPr>
           <a:xfrm>
-            <a:off x="2788920" y="3063240"/>
-            <a:ext cx="365760" cy="320040"/>
+            <a:off x="6400800" y="1371600"/>
+            <a:ext cx="2743200" cy="731520"/>
           </a:xfrm>
           <a:prstGeom prst="rect">
             <a:avLst/>
@@ -3375,34 +3638,35 @@
           <a:noFill/>
         </p:spPr>
         <p:txBody>
-          <a:bodyPr wrap="none" tIns="25400">
+          <a:bodyPr wrap="none">
             <a:spAutoFit/>
           </a:bodyPr>
           <a:lstStyle/>
           <a:p>
-            <a:pPr algn="ctr">
-              <a:defRPr sz="1400" b="1">
+            <a:pPr>
+              <a:defRPr sz="4400" b="1">
                 <a:solidFill>
-                  <a:srgbClr val="F38B00"/>
+                  <a:srgbClr val="E53935"/>
                 </a:solidFill>
+                <a:latin typeface="Arial"/>
               </a:defRPr>
             </a:pPr>
             <a:r>
-              <a:t>?</a:t>
-            </a:r>
-          </a:p>
-        </p:txBody>
-      </p:sp>
-      <p:sp>
-        <p:nvSpPr>
-          <p:cNvPr id="8" name="TextBox 7"/>
+              <a:t>50% ↗</a:t>
+            </a:r>
+          </a:p>
+        </p:txBody>
+      </p:sp>
+      <p:sp>
+        <p:nvSpPr>
+          <p:cNvPr id="18" name="TextBox 17"/>
           <p:cNvSpPr txBox="1"/>
           <p:nvPr/>
         </p:nvSpPr>
         <p:spPr>
           <a:xfrm>
-            <a:off x="4206240" y="2286000"/>
-            <a:ext cx="1828800" cy="914400"/>
+            <a:off x="6400800" y="2103120"/>
+            <a:ext cx="3657600" cy="365760"/>
           </a:xfrm>
           <a:prstGeom prst="rect">
             <a:avLst/>
@@ -3416,56 +3680,29 @@
           <a:lstStyle/>
           <a:p>
             <a:pPr>
-              <a:defRPr sz="1100">
+              <a:defRPr sz="1200">
                 <a:solidFill>
-                  <a:srgbClr val="FFFFFF"/>
+                  <a:srgbClr val="555555"/>
                 </a:solidFill>
+                <a:latin typeface="Microsoft YaHei"/>
               </a:defRPr>
             </a:pPr>
             <a:r>
-              <a:t>虚构字段</a:t>
-            </a:r>
-            <a:br/>
-            <a:r>
-              <a:t>(AI Hallucinations)</a:t>
-            </a:r>
-          </a:p>
-          <a:p>
-            <a:pPr>
-              <a:defRPr sz="2400" b="1">
-                <a:solidFill>
-                  <a:srgbClr val="F38B00"/>
-                </a:solidFill>
-              </a:defRPr>
-            </a:pPr>
-            <a:r>
-              <a:t>50%</a:t>
-            </a:r>
-          </a:p>
-          <a:p>
-            <a:pPr>
-              <a:defRPr sz="1000">
-                <a:solidFill>
-                  <a:srgbClr val="AAAAAA"/>
-                </a:solidFill>
-              </a:defRPr>
-            </a:pPr>
-            <a:r>
-              <a:t>9处核心字段</a:t>
-            </a:r>
-          </a:p>
-        </p:txBody>
-      </p:sp>
-      <p:sp>
-        <p:nvSpPr>
-          <p:cNvPr id="9" name="TextBox 8"/>
+              <a:t>虚构字段比例 (Fictional Field Ratio)</a:t>
+            </a:r>
+          </a:p>
+        </p:txBody>
+      </p:sp>
+      <p:sp>
+        <p:nvSpPr>
+          <p:cNvPr id="19" name="TextBox 18"/>
           <p:cNvSpPr txBox="1"/>
           <p:nvPr/>
         </p:nvSpPr>
         <p:spPr>
           <a:xfrm>
-            <a:off x="182880" y="2834640"/>
-            <a:ext cx="1645920" cy="914400"/>
+            <a:off x="10607040" y="1463040"/>
+            <a:ext cx="914400" cy="914400"/>
           </a:xfrm>
           <a:prstGeom prst="rect">
             <a:avLst/>
@@ -3478,126 +3715,361 @@
           </a:bodyPr>
           <a:lstStyle/>
           <a:p>
-            <a:pPr algn="r">
-              <a:defRPr sz="1100">
+            <a:pPr algn="ctr">
+              <a:defRPr sz="6000">
                 <a:solidFill>
-                  <a:srgbClr val="FFFFFF"/>
+                  <a:srgbClr val="E53935"/>
                 </a:solidFill>
               </a:defRPr>
             </a:pPr>
             <a:r>
-              <a:t>其他错误</a:t>
-            </a:r>
-            <a:br/>
-            <a:r>
-              <a:t>(Other Errors)</a:t>
-            </a:r>
-          </a:p>
-          <a:p>
-            <a:pPr algn="r">
-              <a:defRPr sz="1000">
-                <a:solidFill>
-                  <a:srgbClr val="AAAAAA"/>
-                </a:solidFill>
+              <a:t>⚠️</a:t>
+            </a:r>
+          </a:p>
+        </p:txBody>
+      </p:sp>
+      <p:sp>
+        <p:nvSpPr>
+          <p:cNvPr id="20" name="TextBox 19"/>
+          <p:cNvSpPr txBox="1"/>
+          <p:nvPr/>
+        </p:nvSpPr>
+        <p:spPr>
+          <a:xfrm>
+            <a:off x="6217920" y="2743200"/>
+            <a:ext cx="5486400" cy="365760"/>
+          </a:xfrm>
+          <a:prstGeom prst="rect">
+            <a:avLst/>
+          </a:prstGeom>
+          <a:noFill/>
+        </p:spPr>
+        <p:txBody>
+          <a:bodyPr wrap="none">
+            <a:spAutoFit/>
+          </a:bodyPr>
+          <a:lstStyle/>
+          <a:p>
+            <a:pPr algn="ctr">
+              <a:defRPr sz="1400" b="1">
+                <a:latin typeface="Microsoft YaHei"/>
               </a:defRPr>
             </a:pPr>
             <a:r>
-              <a:t>21个连锁语法错误</a:t>
-            </a:r>
-          </a:p>
-        </p:txBody>
-      </p:sp>
-      <p:cxnSp>
-        <p:nvCxnSpPr>
-          <p:cNvPr id="10" name="Connector 9"/>
-          <p:cNvCxnSpPr/>
+              <a:t>字段对比示例</a:t>
+            </a:r>
+          </a:p>
+        </p:txBody>
+      </p:sp>
+      <p:graphicFrame>
+        <p:nvGraphicFramePr>
+          <p:cNvPr id="21" name="Table 20"/>
+          <p:cNvGraphicFramePr>
+            <a:graphicFrameLocks noGrp="1"/>
+          </p:cNvGraphicFramePr>
           <p:nvPr/>
-        </p:nvCxnSpPr>
+        </p:nvGraphicFramePr>
+        <p:xfrm>
+          <a:off x="6217920" y="3108960"/>
+          <a:ext cx="5486400" cy="1828800"/>
+        </p:xfrm>
+        <a:graphic>
+          <a:graphicData uri="http://schemas.openxmlformats.org/drawingml/2006/table">
+            <a:tbl>
+              <a:tblPr firstRow="1" bandRow="1">
+                <a:tableStyleId>{5C22544A-7EE6-4342-B048-85BDC9FD1C3A}</a:tableStyleId>
+              </a:tblPr>
+              <a:tblGrid>
+                <a:gridCol w="2743200"/>
+                <a:gridCol w="2743200"/>
+              </a:tblGrid>
+              <a:tr h="304800">
+                <a:tc>
+                  <a:txBody>
+                    <a:bodyPr/>
+                    <a:lstStyle/>
+                    <a:p>
+                      <a:pPr>
+                        <a:defRPr sz="1100" b="1">
+                          <a:latin typeface="Microsoft YaHei"/>
+                        </a:defRPr>
+                      </a:pPr>
+                      <a:r>
+                        <a:t> 虚构字段</a:t>
+                      </a:r>
+                    </a:p>
+                  </a:txBody>
+                  <a:tcPr>
+                    <a:solidFill>
+                      <a:srgbClr val="FDEDEC"/>
+                    </a:solidFill>
+                  </a:tcPr>
+                </a:tc>
+                <a:tc>
+                  <a:txBody>
+                    <a:bodyPr/>
+                    <a:lstStyle/>
+                    <a:p>
+                      <a:pPr>
+                        <a:defRPr sz="1100" b="1">
+                          <a:latin typeface="Microsoft YaHei"/>
+                        </a:defRPr>
+                      </a:pPr>
+                      <a:r>
+                        <a:t> 正确字段</a:t>
+                      </a:r>
+                    </a:p>
+                  </a:txBody>
+                  <a:tcPr>
+                    <a:solidFill>
+                      <a:srgbClr val="E8F5E9"/>
+                    </a:solidFill>
+                  </a:tcPr>
+                </a:tc>
+              </a:tr>
+              <a:tr h="304800">
+                <a:tc>
+                  <a:txBody>
+                    <a:bodyPr/>
+                    <a:lstStyle/>
+                    <a:p>
+                      <a:pPr>
+                        <a:defRPr sz="1100">
+                          <a:latin typeface="Microsoft YaHei"/>
+                        </a:defRPr>
+                      </a:pPr>
+                      <a:r>
+                        <a:t>MSEG-QUOTA_ID (不存在)</a:t>
+                      </a:r>
+                    </a:p>
+                  </a:txBody>
+                  <a:tcPr>
+                    <a:solidFill>
+                      <a:srgbClr val="FEF5F5"/>
+                    </a:solidFill>
+                  </a:tcPr>
+                </a:tc>
+                <a:tc>
+                  <a:txBody>
+                    <a:bodyPr/>
+                    <a:lstStyle/>
+                    <a:p>
+                      <a:pPr>
+                        <a:defRPr sz="1100">
+                          <a:latin typeface="Microsoft YaHei"/>
+                        </a:defRPr>
+                      </a:pPr>
+                      <a:r>
+                        <a:t>EKKO-EBELN (采购凭证)</a:t>
+                      </a:r>
+                    </a:p>
+                  </a:txBody>
+                  <a:tcPr>
+                    <a:solidFill>
+                      <a:srgbClr val="F1F8F1"/>
+                    </a:solidFill>
+                  </a:tcPr>
+                </a:tc>
+              </a:tr>
+              <a:tr h="304800">
+                <a:tc>
+                  <a:txBody>
+                    <a:bodyPr/>
+                    <a:lstStyle/>
+                    <a:p>
+                      <a:pPr>
+                        <a:defRPr sz="1100">
+                          <a:latin typeface="Microsoft YaHei"/>
+                        </a:defRPr>
+                      </a:pPr>
+                      <a:r>
+                        <a:t>EKPO-ALLOC_QTY (错误逻辑)</a:t>
+                      </a:r>
+                    </a:p>
+                  </a:txBody>
+                  <a:tcPr>
+                    <a:solidFill>
+                      <a:srgbClr val="FEF5F5"/>
+                    </a:solidFill>
+                  </a:tcPr>
+                </a:tc>
+                <a:tc>
+                  <a:txBody>
+                    <a:bodyPr/>
+                    <a:lstStyle/>
+                    <a:p>
+                      <a:pPr>
+                        <a:defRPr sz="1100">
+                          <a:latin typeface="Microsoft YaHei"/>
+                        </a:defRPr>
+                      </a:pPr>
+                      <a:r>
+                        <a:t>EKPO-MENGE (数量)</a:t>
+                      </a:r>
+                    </a:p>
+                  </a:txBody>
+                  <a:tcPr>
+                    <a:solidFill>
+                      <a:srgbClr val="F1F8F1"/>
+                    </a:solidFill>
+                  </a:tcPr>
+                </a:tc>
+              </a:tr>
+              <a:tr h="304800">
+                <a:tc>
+                  <a:txBody>
+                    <a:bodyPr/>
+                    <a:lstStyle/>
+                    <a:p>
+                      <a:pPr>
+                        <a:defRPr sz="1100">
+                          <a:latin typeface="Microsoft YaHei"/>
+                        </a:defRPr>
+                      </a:pPr>
+                      <a:r>
+                        <a:t>EKPO-ALLOC_QTY (错误逻辑)</a:t>
+                      </a:r>
+                    </a:p>
+                  </a:txBody>
+                  <a:tcPr>
+                    <a:solidFill>
+                      <a:srgbClr val="FEF5F5"/>
+                    </a:solidFill>
+                  </a:tcPr>
+                </a:tc>
+                <a:tc>
+                  <a:txBody>
+                    <a:bodyPr/>
+                    <a:lstStyle/>
+                    <a:p>
+                      <a:pPr>
+                        <a:defRPr sz="1100">
+                          <a:latin typeface="Microsoft YaHei"/>
+                        </a:defRPr>
+                      </a:pPr>
+                      <a:r>
+                        <a:t>EKPO-MENGE (数量)</a:t>
+                      </a:r>
+                    </a:p>
+                  </a:txBody>
+                  <a:tcPr>
+                    <a:solidFill>
+                      <a:srgbClr val="F1F8F1"/>
+                    </a:solidFill>
+                  </a:tcPr>
+                </a:tc>
+              </a:tr>
+              <a:tr h="304800">
+                <a:tc>
+                  <a:txBody>
+                    <a:bodyPr/>
+                    <a:lstStyle/>
+                    <a:p>
+                      <a:pPr>
+                        <a:defRPr sz="1100">
+                          <a:latin typeface="Microsoft YaHei"/>
+                        </a:defRPr>
+                      </a:pPr>
+                      <a:r>
+                        <a:t>EKPO-BLG_ID (不存在)</a:t>
+                      </a:r>
+                    </a:p>
+                  </a:txBody>
+                  <a:tcPr>
+                    <a:solidFill>
+                      <a:srgbClr val="FEF5F5"/>
+                    </a:solidFill>
+                  </a:tcPr>
+                </a:tc>
+                <a:tc>
+                  <a:txBody>
+                    <a:bodyPr/>
+                    <a:lstStyle/>
+                    <a:p>
+                      <a:pPr>
+                        <a:defRPr sz="1100">
+                          <a:latin typeface="Microsoft YaHei"/>
+                        </a:defRPr>
+                      </a:pPr>
+                      <a:r>
+                        <a:t>EKKO-QUOTA (数量)</a:t>
+                      </a:r>
+                    </a:p>
+                  </a:txBody>
+                  <a:tcPr>
+                    <a:solidFill>
+                      <a:srgbClr val="F1F8F1"/>
+                    </a:solidFill>
+                  </a:tcPr>
+                </a:tc>
+              </a:tr>
+              <a:tr h="304800">
+                <a:tc>
+                  <a:txBody>
+                    <a:bodyPr/>
+                    <a:lstStyle/>
+                    <a:p>
+                      <a:pPr>
+                        <a:defRPr sz="1100">
+                          <a:latin typeface="Microsoft YaHei"/>
+                        </a:defRPr>
+                      </a:pPr>
+                      <a:r>
+                        <a:t>...</a:t>
+                      </a:r>
+                    </a:p>
+                  </a:txBody>
+                  <a:tcPr>
+                    <a:solidFill>
+                      <a:srgbClr val="FEF5F5"/>
+                    </a:solidFill>
+                  </a:tcPr>
+                </a:tc>
+                <a:tc>
+                  <a:txBody>
+                    <a:bodyPr/>
+                    <a:lstStyle/>
+                    <a:p>
+                      <a:pPr>
+                        <a:defRPr sz="1100">
+                          <a:latin typeface="Microsoft YaHei"/>
+                        </a:defRPr>
+                      </a:pPr>
+                      <a:r>
+                        <a:t>...</a:t>
+                      </a:r>
+                    </a:p>
+                  </a:txBody>
+                  <a:tcPr>
+                    <a:solidFill>
+                      <a:srgbClr val="F1F8F1"/>
+                    </a:solidFill>
+                  </a:tcPr>
+                </a:tc>
+              </a:tr>
+            </a:tbl>
+          </a:graphicData>
+        </a:graphic>
+      </p:graphicFrame>
+      <p:sp>
+        <p:nvSpPr>
+          <p:cNvPr id="22" name="Rounded Rectangle 21"/>
+          <p:cNvSpPr/>
+          <p:nvPr/>
+        </p:nvSpPr>
         <p:spPr>
           <a:xfrm>
-            <a:off x="1645920" y="3108960"/>
-            <a:ext cx="274320" cy="0"/>
-          </a:xfrm>
-          <a:prstGeom prst="line">
-            <a:avLst/>
-          </a:prstGeom>
-          <a:ln>
-            <a:solidFill>
-              <a:srgbClr val="AAAAAA"/>
-            </a:solidFill>
-          </a:ln>
-        </p:spPr>
-        <p:style>
-          <a:lnRef idx="2">
-            <a:schemeClr val="accent1"/>
-          </a:lnRef>
-          <a:fillRef idx="0">
-            <a:schemeClr val="accent1"/>
-          </a:fillRef>
-          <a:effectRef idx="1">
-            <a:schemeClr val="accent1"/>
-          </a:effectRef>
-          <a:fontRef idx="minor">
-            <a:schemeClr val="tx1"/>
-          </a:fontRef>
-        </p:style>
-      </p:cxnSp>
-      <p:cxnSp>
-        <p:nvCxnSpPr>
-          <p:cNvPr id="11" name="Connector 10"/>
-          <p:cNvCxnSpPr/>
-          <p:nvPr/>
-        </p:nvCxnSpPr>
-        <p:spPr>
-          <a:xfrm>
-            <a:off x="4023360" y="3108960"/>
-            <a:ext cx="274320" cy="0"/>
-          </a:xfrm>
-          <a:prstGeom prst="line">
-            <a:avLst/>
-          </a:prstGeom>
-          <a:ln>
-            <a:solidFill>
-              <a:srgbClr val="F38B00"/>
-            </a:solidFill>
-          </a:ln>
-        </p:spPr>
-        <p:style>
-          <a:lnRef idx="2">
-            <a:schemeClr val="accent1"/>
-          </a:lnRef>
-          <a:fillRef idx="0">
-            <a:schemeClr val="accent1"/>
-          </a:fillRef>
-          <a:effectRef idx="1">
-            <a:schemeClr val="accent1"/>
-          </a:effectRef>
-          <a:fontRef idx="minor">
-            <a:schemeClr val="tx1"/>
-          </a:fontRef>
-        </p:style>
-      </p:cxnSp>
-      <p:sp>
-        <p:nvSpPr>
-          <p:cNvPr id="12" name="Rounded Rectangle 11"/>
-          <p:cNvSpPr/>
-          <p:nvPr/>
-        </p:nvSpPr>
-        <p:spPr>
-          <a:xfrm>
-            <a:off x="457200" y="4754880"/>
-            <a:ext cx="5029200" cy="1828800"/>
+            <a:off x="6217920" y="5212080"/>
+            <a:ext cx="1097280" cy="1097280"/>
           </a:xfrm>
           <a:prstGeom prst="roundRect">
             <a:avLst/>
           </a:prstGeom>
           <a:solidFill>
-            <a:srgbClr val="383838"/>
+            <a:srgbClr val="E53935"/>
           </a:solidFill>
-          <a:ln w="12700">
-            <a:solidFill>
-              <a:srgbClr val="F38B00"/>
-            </a:solidFill>
+          <a:ln>
+            <a:noFill/>
           </a:ln>
         </p:spPr>
         <p:style>
@@ -3615,69 +4087,55 @@
           </a:fontRef>
         </p:style>
         <p:txBody>
-          <a:bodyPr rtlCol="0" anchor="ctr"/>
-          <a:lstStyle/>
-          <a:p>
-            <a:pPr algn="ctr"/>
-          </a:p>
-        </p:txBody>
-      </p:sp>
-      <p:sp>
-        <p:nvSpPr>
-          <p:cNvPr id="13" name="TextBox 12"/>
-          <p:cNvSpPr txBox="1"/>
-          <p:nvPr/>
-        </p:nvSpPr>
-        <p:spPr>
-          <a:xfrm>
-            <a:off x="457200" y="4800600"/>
-            <a:ext cx="5029200" cy="274320"/>
-          </a:xfrm>
-          <a:prstGeom prst="rect">
-            <a:avLst/>
-          </a:prstGeom>
-          <a:noFill/>
-        </p:spPr>
-        <p:txBody>
-          <a:bodyPr wrap="none">
-            <a:spAutoFit/>
-          </a:bodyPr>
+          <a:bodyPr rtlCol="0" anchor="ctr" wrap="square"/>
           <a:lstStyle/>
           <a:p>
             <a:pPr algn="ctr">
-              <a:defRPr sz="1300" b="1">
+              <a:defRPr sz="2000" b="1">
                 <a:solidFill>
                   <a:srgbClr val="FFFFFF"/>
                 </a:solidFill>
+                <a:latin typeface="Arial"/>
               </a:defRPr>
             </a:pPr>
             <a:r>
-              <a:t>AI 虚构字段 vs SAP 实际字段</a:t>
-            </a:r>
-          </a:p>
-        </p:txBody>
-      </p:sp>
-      <p:sp>
-        <p:nvSpPr>
-          <p:cNvPr id="14" name="Rounded Rectangle 13"/>
+              <a:t>50%</a:t>
+            </a:r>
+          </a:p>
+          <a:p>
+            <a:pPr algn="ctr">
+              <a:defRPr sz="1200">
+                <a:solidFill>
+                  <a:srgbClr val="FFFFFF"/>
+                </a:solidFill>
+                <a:latin typeface="Microsoft YaHei"/>
+              </a:defRPr>
+            </a:pPr>
+            <a:r>
+              <a:t>虚构字段</a:t>
+            </a:r>
+          </a:p>
+        </p:txBody>
+      </p:sp>
+      <p:sp>
+        <p:nvSpPr>
+          <p:cNvPr id="23" name="Right Arrow 22"/>
           <p:cNvSpPr/>
           <p:nvPr/>
         </p:nvSpPr>
         <p:spPr>
           <a:xfrm>
-            <a:off x="640080" y="5120640"/>
-            <a:ext cx="2194560" cy="228600"/>
+            <a:off x="7406640" y="5669280"/>
+            <a:ext cx="274320" cy="182880"/>
           </a:xfrm>
-          <a:prstGeom prst="roundRect">
+          <a:prstGeom prst="rightArrow">
             <a:avLst/>
           </a:prstGeom>
           <a:solidFill>
-            <a:srgbClr val="503C28"/>
+            <a:srgbClr val="555555"/>
           </a:solidFill>
           <a:ln>
-            <a:solidFill>
-              <a:srgbClr val="F38B00"/>
-            </a:solidFill>
+            <a:noFill/>
           </a:ln>
         </p:spPr>
         <p:style>
@@ -3698,40 +4156,29 @@
           <a:bodyPr rtlCol="0" anchor="ctr"/>
           <a:lstStyle/>
           <a:p>
-            <a:pPr algn="ctr">
-              <a:defRPr sz="1100" b="1">
-                <a:solidFill>
-                  <a:srgbClr val="F38B00"/>
-                </a:solidFill>
-              </a:defRPr>
-            </a:pPr>
-            <a:r>
-              <a:t>AI 虚构</a:t>
-            </a:r>
-          </a:p>
-        </p:txBody>
-      </p:sp>
-      <p:sp>
-        <p:nvSpPr>
-          <p:cNvPr id="15" name="Rounded Rectangle 14"/>
+            <a:pPr algn="ctr"/>
+          </a:p>
+        </p:txBody>
+      </p:sp>
+      <p:sp>
+        <p:nvSpPr>
+          <p:cNvPr id="24" name="Rounded Rectangle 23"/>
           <p:cNvSpPr/>
           <p:nvPr/>
         </p:nvSpPr>
         <p:spPr>
           <a:xfrm>
-            <a:off x="3108960" y="5120640"/>
-            <a:ext cx="2194560" cy="228600"/>
+            <a:off x="7772400" y="5212080"/>
+            <a:ext cx="1463040" cy="1097280"/>
           </a:xfrm>
           <a:prstGeom prst="roundRect">
             <a:avLst/>
           </a:prstGeom>
           <a:solidFill>
-            <a:srgbClr val="505050"/>
+            <a:srgbClr val="E53935"/>
           </a:solidFill>
           <a:ln>
-            <a:solidFill>
-              <a:srgbClr val="787878"/>
-            </a:solidFill>
+            <a:noFill/>
           </a:ln>
         </p:spPr>
         <p:style>
@@ -3749,44 +4196,54 @@
           </a:fontRef>
         </p:style>
         <p:txBody>
-          <a:bodyPr rtlCol="0" anchor="ctr"/>
+          <a:bodyPr rtlCol="0" anchor="ctr" wrap="square"/>
           <a:lstStyle/>
           <a:p>
             <a:pPr algn="ctr">
-              <a:defRPr sz="1100" b="1">
+              <a:defRPr sz="2000">
                 <a:solidFill>
                   <a:srgbClr val="FFFFFF"/>
                 </a:solidFill>
               </a:defRPr>
             </a:pPr>
             <a:r>
-              <a:t>SAP 实际</a:t>
-            </a:r>
-          </a:p>
-        </p:txBody>
-      </p:sp>
-      <p:sp>
-        <p:nvSpPr>
-          <p:cNvPr id="16" name="Rounded Rectangle 15"/>
+              <a:t>🔗</a:t>
+            </a:r>
+          </a:p>
+          <a:p>
+            <a:pPr algn="ctr">
+              <a:defRPr sz="1100">
+                <a:solidFill>
+                  <a:srgbClr val="FFFFFF"/>
+                </a:solidFill>
+                <a:latin typeface="Microsoft YaHei"/>
+              </a:defRPr>
+            </a:pPr>
+            <a:r>
+              <a:t>21 个连锁语法错误</a:t>
+            </a:r>
+          </a:p>
+        </p:txBody>
+      </p:sp>
+      <p:sp>
+        <p:nvSpPr>
+          <p:cNvPr id="25" name="Right Arrow 24"/>
           <p:cNvSpPr/>
           <p:nvPr/>
         </p:nvSpPr>
         <p:spPr>
           <a:xfrm>
-            <a:off x="640080" y="5394960"/>
-            <a:ext cx="2194560" cy="201168"/>
+            <a:off x="9326880" y="5669280"/>
+            <a:ext cx="274320" cy="182880"/>
           </a:xfrm>
-          <a:prstGeom prst="roundRect">
+          <a:prstGeom prst="rightArrow">
             <a:avLst/>
           </a:prstGeom>
           <a:solidFill>
-            <a:srgbClr val="414141"/>
+            <a:srgbClr val="555555"/>
           </a:solidFill>
           <a:ln>
-            <a:solidFill>
-              <a:srgbClr val="F38B00"/>
-            </a:solidFill>
-            <a:prstDash val="dash"/>
+            <a:noFill/>
           </a:ln>
         </p:spPr>
         <p:style>
@@ -3807,75 +4264,29 @@
           <a:bodyPr rtlCol="0" anchor="ctr"/>
           <a:lstStyle/>
           <a:p>
-            <a:pPr algn="l">
-              <a:defRPr sz="1000">
-                <a:solidFill>
-                  <a:srgbClr val="F38B00"/>
-                </a:solidFill>
-              </a:defRPr>
-            </a:pPr>
-            <a:r>
-              <a:t>  Z_QUOTA_QTY</a:t>
-            </a:r>
-          </a:p>
-        </p:txBody>
-      </p:sp>
-      <p:sp>
-        <p:nvSpPr>
-          <p:cNvPr id="17" name="TextBox 16"/>
-          <p:cNvSpPr txBox="1"/>
+            <a:pPr algn="ctr"/>
+          </a:p>
+        </p:txBody>
+      </p:sp>
+      <p:sp>
+        <p:nvSpPr>
+          <p:cNvPr id="26" name="Rounded Rectangle 25"/>
+          <p:cNvSpPr/>
           <p:nvPr/>
         </p:nvSpPr>
         <p:spPr>
           <a:xfrm>
-            <a:off x="2560320" y="5376672"/>
-            <a:ext cx="274320" cy="201168"/>
-          </a:xfrm>
-          <a:prstGeom prst="rect">
-            <a:avLst/>
-          </a:prstGeom>
-          <a:noFill/>
-        </p:spPr>
-        <p:txBody>
-          <a:bodyPr wrap="none">
-            <a:spAutoFit/>
-          </a:bodyPr>
-          <a:lstStyle/>
-          <a:p>
-            <a:pPr algn="r">
-              <a:defRPr sz="1000">
-                <a:solidFill>
-                  <a:srgbClr val="F38B00"/>
-                </a:solidFill>
-              </a:defRPr>
-            </a:pPr>
-            <a:r>
-              <a:t>⚠</a:t>
-            </a:r>
-          </a:p>
-        </p:txBody>
-      </p:sp>
-      <p:sp>
-        <p:nvSpPr>
-          <p:cNvPr id="18" name="Rounded Rectangle 17"/>
-          <p:cNvSpPr/>
-          <p:nvPr/>
-        </p:nvSpPr>
-        <p:spPr>
-          <a:xfrm>
-            <a:off x="3108960" y="5394960"/>
-            <a:ext cx="2194560" cy="201168"/>
+            <a:off x="9692640" y="5212080"/>
+            <a:ext cx="2011680" cy="1097280"/>
           </a:xfrm>
           <a:prstGeom prst="roundRect">
             <a:avLst/>
           </a:prstGeom>
           <a:solidFill>
-            <a:srgbClr val="414141"/>
+            <a:srgbClr val="E53935"/>
           </a:solidFill>
           <a:ln>
-            <a:solidFill>
-              <a:srgbClr val="787878"/>
-            </a:solidFill>
+            <a:noFill/>
           </a:ln>
         </p:spPr>
         <p:style>
@@ -3893,32 +4304,49 @@
           </a:fontRef>
         </p:style>
         <p:txBody>
-          <a:bodyPr rtlCol="0" anchor="ctr"/>
-          <a:lstStyle/>
-          <a:p>
-            <a:pPr algn="l">
-              <a:defRPr sz="1000">
+          <a:bodyPr rtlCol="0" anchor="ctr" wrap="square"/>
+          <a:lstStyle/>
+          <a:p>
+            <a:pPr algn="ctr">
+              <a:defRPr sz="2000">
                 <a:solidFill>
                   <a:srgbClr val="FFFFFF"/>
                 </a:solidFill>
               </a:defRPr>
             </a:pPr>
             <a:r>
-              <a:t>  MENG</a:t>
-            </a:r>
-          </a:p>
-        </p:txBody>
-      </p:sp>
-      <p:sp>
-        <p:nvSpPr>
-          <p:cNvPr id="19" name="TextBox 18"/>
+              <a:t>🚫</a:t>
+            </a:r>
+          </a:p>
+          <a:p>
+            <a:pPr algn="ctr">
+              <a:defRPr sz="1000">
+                <a:solidFill>
+                  <a:srgbClr val="FFFFFF"/>
+                </a:solidFill>
+                <a:latin typeface="Microsoft YaHei"/>
+              </a:defRPr>
+            </a:pPr>
+            <a:r>
+              <a:t>AI 修复成本 &gt;&gt; 重写成本，</a:t>
+            </a:r>
+            <a:br/>
+            <a:r>
+              <a:t>整体效率对比手写无提升</a:t>
+            </a:r>
+          </a:p>
+        </p:txBody>
+      </p:sp>
+      <p:sp>
+        <p:nvSpPr>
+          <p:cNvPr id="27" name="TextBox 26"/>
           <p:cNvSpPr txBox="1"/>
           <p:nvPr/>
         </p:nvSpPr>
         <p:spPr>
           <a:xfrm>
-            <a:off x="5029200" y="5376672"/>
-            <a:ext cx="274320" cy="201168"/>
+            <a:off x="10515600" y="6400800"/>
+            <a:ext cx="1371600" cy="274320"/>
           </a:xfrm>
           <a:prstGeom prst="rect">
             <a:avLst/>
@@ -3934,1412 +4362,12 @@
             <a:pPr algn="r">
               <a:defRPr sz="1000">
                 <a:solidFill>
-                  <a:srgbClr val="AAAAAA"/>
+                  <a:srgbClr val="555555"/>
                 </a:solidFill>
               </a:defRPr>
             </a:pPr>
             <a:r>
-              <a:t>✔</a:t>
-            </a:r>
-          </a:p>
-        </p:txBody>
-      </p:sp>
-      <p:sp>
-        <p:nvSpPr>
-          <p:cNvPr id="20" name="Rounded Rectangle 19"/>
-          <p:cNvSpPr/>
-          <p:nvPr/>
-        </p:nvSpPr>
-        <p:spPr>
-          <a:xfrm>
-            <a:off x="640080" y="5632704"/>
-            <a:ext cx="2194560" cy="201168"/>
-          </a:xfrm>
-          <a:prstGeom prst="roundRect">
-            <a:avLst/>
-          </a:prstGeom>
-          <a:solidFill>
-            <a:srgbClr val="414141"/>
-          </a:solidFill>
-          <a:ln>
-            <a:solidFill>
-              <a:srgbClr val="F38B00"/>
-            </a:solidFill>
-            <a:prstDash val="dash"/>
-          </a:ln>
-        </p:spPr>
-        <p:style>
-          <a:lnRef idx="1">
-            <a:schemeClr val="accent1"/>
-          </a:lnRef>
-          <a:fillRef idx="3">
-            <a:schemeClr val="accent1"/>
-          </a:fillRef>
-          <a:effectRef idx="2">
-            <a:schemeClr val="accent1"/>
-          </a:effectRef>
-          <a:fontRef idx="minor">
-            <a:schemeClr val="lt1"/>
-          </a:fontRef>
-        </p:style>
-        <p:txBody>
-          <a:bodyPr rtlCol="0" anchor="ctr"/>
-          <a:lstStyle/>
-          <a:p>
-            <a:pPr algn="l">
-              <a:defRPr sz="1000">
-                <a:solidFill>
-                  <a:srgbClr val="F38B00"/>
-                </a:solidFill>
-              </a:defRPr>
-            </a:pPr>
-            <a:r>
-              <a:t>  Z_SOURCE_VEND</a:t>
-            </a:r>
-          </a:p>
-        </p:txBody>
-      </p:sp>
-      <p:sp>
-        <p:nvSpPr>
-          <p:cNvPr id="21" name="TextBox 20"/>
-          <p:cNvSpPr txBox="1"/>
-          <p:nvPr/>
-        </p:nvSpPr>
-        <p:spPr>
-          <a:xfrm>
-            <a:off x="2560320" y="5614416"/>
-            <a:ext cx="274320" cy="201168"/>
-          </a:xfrm>
-          <a:prstGeom prst="rect">
-            <a:avLst/>
-          </a:prstGeom>
-          <a:noFill/>
-        </p:spPr>
-        <p:txBody>
-          <a:bodyPr wrap="none">
-            <a:spAutoFit/>
-          </a:bodyPr>
-          <a:lstStyle/>
-          <a:p>
-            <a:pPr algn="r">
-              <a:defRPr sz="1000">
-                <a:solidFill>
-                  <a:srgbClr val="F38B00"/>
-                </a:solidFill>
-              </a:defRPr>
-            </a:pPr>
-            <a:r>
-              <a:t>⚠</a:t>
-            </a:r>
-          </a:p>
-        </p:txBody>
-      </p:sp>
-      <p:sp>
-        <p:nvSpPr>
-          <p:cNvPr id="22" name="Rounded Rectangle 21"/>
-          <p:cNvSpPr/>
-          <p:nvPr/>
-        </p:nvSpPr>
-        <p:spPr>
-          <a:xfrm>
-            <a:off x="3108960" y="5632704"/>
-            <a:ext cx="2194560" cy="201168"/>
-          </a:xfrm>
-          <a:prstGeom prst="roundRect">
-            <a:avLst/>
-          </a:prstGeom>
-          <a:solidFill>
-            <a:srgbClr val="414141"/>
-          </a:solidFill>
-          <a:ln>
-            <a:solidFill>
-              <a:srgbClr val="787878"/>
-            </a:solidFill>
-          </a:ln>
-        </p:spPr>
-        <p:style>
-          <a:lnRef idx="1">
-            <a:schemeClr val="accent1"/>
-          </a:lnRef>
-          <a:fillRef idx="3">
-            <a:schemeClr val="accent1"/>
-          </a:fillRef>
-          <a:effectRef idx="2">
-            <a:schemeClr val="accent1"/>
-          </a:effectRef>
-          <a:fontRef idx="minor">
-            <a:schemeClr val="lt1"/>
-          </a:fontRef>
-        </p:style>
-        <p:txBody>
-          <a:bodyPr rtlCol="0" anchor="ctr"/>
-          <a:lstStyle/>
-          <a:p>
-            <a:pPr algn="l">
-              <a:defRPr sz="1000">
-                <a:solidFill>
-                  <a:srgbClr val="FFFFFF"/>
-                </a:solidFill>
-              </a:defRPr>
-            </a:pPr>
-            <a:r>
-              <a:t>  LIFNR</a:t>
-            </a:r>
-          </a:p>
-        </p:txBody>
-      </p:sp>
-      <p:sp>
-        <p:nvSpPr>
-          <p:cNvPr id="23" name="TextBox 22"/>
-          <p:cNvSpPr txBox="1"/>
-          <p:nvPr/>
-        </p:nvSpPr>
-        <p:spPr>
-          <a:xfrm>
-            <a:off x="5029200" y="5614416"/>
-            <a:ext cx="274320" cy="201168"/>
-          </a:xfrm>
-          <a:prstGeom prst="rect">
-            <a:avLst/>
-          </a:prstGeom>
-          <a:noFill/>
-        </p:spPr>
-        <p:txBody>
-          <a:bodyPr wrap="none">
-            <a:spAutoFit/>
-          </a:bodyPr>
-          <a:lstStyle/>
-          <a:p>
-            <a:pPr algn="r">
-              <a:defRPr sz="1000">
-                <a:solidFill>
-                  <a:srgbClr val="AAAAAA"/>
-                </a:solidFill>
-              </a:defRPr>
-            </a:pPr>
-            <a:r>
-              <a:t>✔</a:t>
-            </a:r>
-          </a:p>
-        </p:txBody>
-      </p:sp>
-      <p:sp>
-        <p:nvSpPr>
-          <p:cNvPr id="24" name="Rounded Rectangle 23"/>
-          <p:cNvSpPr/>
-          <p:nvPr/>
-        </p:nvSpPr>
-        <p:spPr>
-          <a:xfrm>
-            <a:off x="640080" y="5870448"/>
-            <a:ext cx="2194560" cy="201168"/>
-          </a:xfrm>
-          <a:prstGeom prst="roundRect">
-            <a:avLst/>
-          </a:prstGeom>
-          <a:solidFill>
-            <a:srgbClr val="414141"/>
-          </a:solidFill>
-          <a:ln>
-            <a:solidFill>
-              <a:srgbClr val="F38B00"/>
-            </a:solidFill>
-            <a:prstDash val="dash"/>
-          </a:ln>
-        </p:spPr>
-        <p:style>
-          <a:lnRef idx="1">
-            <a:schemeClr val="accent1"/>
-          </a:lnRef>
-          <a:fillRef idx="3">
-            <a:schemeClr val="accent1"/>
-          </a:fillRef>
-          <a:effectRef idx="2">
-            <a:schemeClr val="accent1"/>
-          </a:effectRef>
-          <a:fontRef idx="minor">
-            <a:schemeClr val="lt1"/>
-          </a:fontRef>
-        </p:style>
-        <p:txBody>
-          <a:bodyPr rtlCol="0" anchor="ctr"/>
-          <a:lstStyle/>
-          <a:p>
-            <a:pPr algn="l">
-              <a:defRPr sz="1000">
-                <a:solidFill>
-                  <a:srgbClr val="F38B00"/>
-                </a:solidFill>
-              </a:defRPr>
-            </a:pPr>
-            <a:r>
-              <a:t>  Z_QUOTA_UNIT</a:t>
-            </a:r>
-          </a:p>
-        </p:txBody>
-      </p:sp>
-      <p:sp>
-        <p:nvSpPr>
-          <p:cNvPr id="25" name="TextBox 24"/>
-          <p:cNvSpPr txBox="1"/>
-          <p:nvPr/>
-        </p:nvSpPr>
-        <p:spPr>
-          <a:xfrm>
-            <a:off x="2560320" y="5852160"/>
-            <a:ext cx="274320" cy="201168"/>
-          </a:xfrm>
-          <a:prstGeom prst="rect">
-            <a:avLst/>
-          </a:prstGeom>
-          <a:noFill/>
-        </p:spPr>
-        <p:txBody>
-          <a:bodyPr wrap="none">
-            <a:spAutoFit/>
-          </a:bodyPr>
-          <a:lstStyle/>
-          <a:p>
-            <a:pPr algn="r">
-              <a:defRPr sz="1000">
-                <a:solidFill>
-                  <a:srgbClr val="F38B00"/>
-                </a:solidFill>
-              </a:defRPr>
-            </a:pPr>
-            <a:r>
-              <a:t>⚠</a:t>
-            </a:r>
-          </a:p>
-        </p:txBody>
-      </p:sp>
-      <p:sp>
-        <p:nvSpPr>
-          <p:cNvPr id="26" name="Rounded Rectangle 25"/>
-          <p:cNvSpPr/>
-          <p:nvPr/>
-        </p:nvSpPr>
-        <p:spPr>
-          <a:xfrm>
-            <a:off x="3108960" y="5870448"/>
-            <a:ext cx="2194560" cy="201168"/>
-          </a:xfrm>
-          <a:prstGeom prst="roundRect">
-            <a:avLst/>
-          </a:prstGeom>
-          <a:solidFill>
-            <a:srgbClr val="414141"/>
-          </a:solidFill>
-          <a:ln>
-            <a:solidFill>
-              <a:srgbClr val="787878"/>
-            </a:solidFill>
-          </a:ln>
-        </p:spPr>
-        <p:style>
-          <a:lnRef idx="1">
-            <a:schemeClr val="accent1"/>
-          </a:lnRef>
-          <a:fillRef idx="3">
-            <a:schemeClr val="accent1"/>
-          </a:fillRef>
-          <a:effectRef idx="2">
-            <a:schemeClr val="accent1"/>
-          </a:effectRef>
-          <a:fontRef idx="minor">
-            <a:schemeClr val="lt1"/>
-          </a:fontRef>
-        </p:style>
-        <p:txBody>
-          <a:bodyPr rtlCol="0" anchor="ctr"/>
-          <a:lstStyle/>
-          <a:p>
-            <a:pPr algn="l">
-              <a:defRPr sz="1000">
-                <a:solidFill>
-                  <a:srgbClr val="FFFFFF"/>
-                </a:solidFill>
-              </a:defRPr>
-            </a:pPr>
-            <a:r>
-              <a:t>  MEINS</a:t>
-            </a:r>
-          </a:p>
-        </p:txBody>
-      </p:sp>
-      <p:sp>
-        <p:nvSpPr>
-          <p:cNvPr id="27" name="TextBox 26"/>
-          <p:cNvSpPr txBox="1"/>
-          <p:nvPr/>
-        </p:nvSpPr>
-        <p:spPr>
-          <a:xfrm>
-            <a:off x="5029200" y="5852160"/>
-            <a:ext cx="274320" cy="201168"/>
-          </a:xfrm>
-          <a:prstGeom prst="rect">
-            <a:avLst/>
-          </a:prstGeom>
-          <a:noFill/>
-        </p:spPr>
-        <p:txBody>
-          <a:bodyPr wrap="none">
-            <a:spAutoFit/>
-          </a:bodyPr>
-          <a:lstStyle/>
-          <a:p>
-            <a:pPr algn="r">
-              <a:defRPr sz="1000">
-                <a:solidFill>
-                  <a:srgbClr val="AAAAAA"/>
-                </a:solidFill>
-              </a:defRPr>
-            </a:pPr>
-            <a:r>
-              <a:t>✔</a:t>
-            </a:r>
-          </a:p>
-        </p:txBody>
-      </p:sp>
-      <p:sp>
-        <p:nvSpPr>
-          <p:cNvPr id="28" name="Rounded Rectangle 27"/>
-          <p:cNvSpPr/>
-          <p:nvPr/>
-        </p:nvSpPr>
-        <p:spPr>
-          <a:xfrm>
-            <a:off x="640080" y="6108192"/>
-            <a:ext cx="2194560" cy="201168"/>
-          </a:xfrm>
-          <a:prstGeom prst="roundRect">
-            <a:avLst/>
-          </a:prstGeom>
-          <a:solidFill>
-            <a:srgbClr val="414141"/>
-          </a:solidFill>
-          <a:ln>
-            <a:solidFill>
-              <a:srgbClr val="F38B00"/>
-            </a:solidFill>
-            <a:prstDash val="dash"/>
-          </a:ln>
-        </p:spPr>
-        <p:style>
-          <a:lnRef idx="1">
-            <a:schemeClr val="accent1"/>
-          </a:lnRef>
-          <a:fillRef idx="3">
-            <a:schemeClr val="accent1"/>
-          </a:fillRef>
-          <a:effectRef idx="2">
-            <a:schemeClr val="accent1"/>
-          </a:effectRef>
-          <a:fontRef idx="minor">
-            <a:schemeClr val="lt1"/>
-          </a:fontRef>
-        </p:style>
-        <p:txBody>
-          <a:bodyPr rtlCol="0" anchor="ctr"/>
-          <a:lstStyle/>
-          <a:p>
-            <a:pPr algn="l">
-              <a:defRPr sz="1000">
-                <a:solidFill>
-                  <a:srgbClr val="F38B00"/>
-                </a:solidFill>
-              </a:defRPr>
-            </a:pPr>
-            <a:r>
-              <a:t>  Z_VALID_TO</a:t>
-            </a:r>
-          </a:p>
-        </p:txBody>
-      </p:sp>
-      <p:sp>
-        <p:nvSpPr>
-          <p:cNvPr id="29" name="TextBox 28"/>
-          <p:cNvSpPr txBox="1"/>
-          <p:nvPr/>
-        </p:nvSpPr>
-        <p:spPr>
-          <a:xfrm>
-            <a:off x="2560320" y="6089904"/>
-            <a:ext cx="274320" cy="201168"/>
-          </a:xfrm>
-          <a:prstGeom prst="rect">
-            <a:avLst/>
-          </a:prstGeom>
-          <a:noFill/>
-        </p:spPr>
-        <p:txBody>
-          <a:bodyPr wrap="none">
-            <a:spAutoFit/>
-          </a:bodyPr>
-          <a:lstStyle/>
-          <a:p>
-            <a:pPr algn="r">
-              <a:defRPr sz="1000">
-                <a:solidFill>
-                  <a:srgbClr val="F38B00"/>
-                </a:solidFill>
-              </a:defRPr>
-            </a:pPr>
-            <a:r>
-              <a:t>⚠</a:t>
-            </a:r>
-          </a:p>
-        </p:txBody>
-      </p:sp>
-      <p:sp>
-        <p:nvSpPr>
-          <p:cNvPr id="30" name="Rounded Rectangle 29"/>
-          <p:cNvSpPr/>
-          <p:nvPr/>
-        </p:nvSpPr>
-        <p:spPr>
-          <a:xfrm>
-            <a:off x="3108960" y="6108192"/>
-            <a:ext cx="2194560" cy="201168"/>
-          </a:xfrm>
-          <a:prstGeom prst="roundRect">
-            <a:avLst/>
-          </a:prstGeom>
-          <a:solidFill>
-            <a:srgbClr val="414141"/>
-          </a:solidFill>
-          <a:ln>
-            <a:solidFill>
-              <a:srgbClr val="787878"/>
-            </a:solidFill>
-          </a:ln>
-        </p:spPr>
-        <p:style>
-          <a:lnRef idx="1">
-            <a:schemeClr val="accent1"/>
-          </a:lnRef>
-          <a:fillRef idx="3">
-            <a:schemeClr val="accent1"/>
-          </a:fillRef>
-          <a:effectRef idx="2">
-            <a:schemeClr val="accent1"/>
-          </a:effectRef>
-          <a:fontRef idx="minor">
-            <a:schemeClr val="lt1"/>
-          </a:fontRef>
-        </p:style>
-        <p:txBody>
-          <a:bodyPr rtlCol="0" anchor="ctr"/>
-          <a:lstStyle/>
-          <a:p>
-            <a:pPr algn="l">
-              <a:defRPr sz="1000">
-                <a:solidFill>
-                  <a:srgbClr val="FFFFFF"/>
-                </a:solidFill>
-              </a:defRPr>
-            </a:pPr>
-            <a:r>
-              <a:t>  DATBI</a:t>
-            </a:r>
-          </a:p>
-        </p:txBody>
-      </p:sp>
-      <p:sp>
-        <p:nvSpPr>
-          <p:cNvPr id="31" name="TextBox 30"/>
-          <p:cNvSpPr txBox="1"/>
-          <p:nvPr/>
-        </p:nvSpPr>
-        <p:spPr>
-          <a:xfrm>
-            <a:off x="5029200" y="6089904"/>
-            <a:ext cx="274320" cy="201168"/>
-          </a:xfrm>
-          <a:prstGeom prst="rect">
-            <a:avLst/>
-          </a:prstGeom>
-          <a:noFill/>
-        </p:spPr>
-        <p:txBody>
-          <a:bodyPr wrap="none">
-            <a:spAutoFit/>
-          </a:bodyPr>
-          <a:lstStyle/>
-          <a:p>
-            <a:pPr algn="r">
-              <a:defRPr sz="1000">
-                <a:solidFill>
-                  <a:srgbClr val="AAAAAA"/>
-                </a:solidFill>
-              </a:defRPr>
-            </a:pPr>
-            <a:r>
-              <a:t>✔</a:t>
-            </a:r>
-          </a:p>
-        </p:txBody>
-      </p:sp>
-      <p:sp>
-        <p:nvSpPr>
-          <p:cNvPr id="32" name="Rounded Rectangle 31"/>
-          <p:cNvSpPr/>
-          <p:nvPr/>
-        </p:nvSpPr>
-        <p:spPr>
-          <a:xfrm>
-            <a:off x="640080" y="6345936"/>
-            <a:ext cx="2194560" cy="201168"/>
-          </a:xfrm>
-          <a:prstGeom prst="roundRect">
-            <a:avLst/>
-          </a:prstGeom>
-          <a:solidFill>
-            <a:srgbClr val="414141"/>
-          </a:solidFill>
-          <a:ln>
-            <a:solidFill>
-              <a:srgbClr val="F38B00"/>
-            </a:solidFill>
-            <a:prstDash val="dash"/>
-          </a:ln>
-        </p:spPr>
-        <p:style>
-          <a:lnRef idx="1">
-            <a:schemeClr val="accent1"/>
-          </a:lnRef>
-          <a:fillRef idx="3">
-            <a:schemeClr val="accent1"/>
-          </a:fillRef>
-          <a:effectRef idx="2">
-            <a:schemeClr val="accent1"/>
-          </a:effectRef>
-          <a:fontRef idx="minor">
-            <a:schemeClr val="lt1"/>
-          </a:fontRef>
-        </p:style>
-        <p:txBody>
-          <a:bodyPr rtlCol="0" anchor="ctr"/>
-          <a:lstStyle/>
-          <a:p>
-            <a:pPr algn="l">
-              <a:defRPr sz="1000">
-                <a:solidFill>
-                  <a:srgbClr val="F38B00"/>
-                </a:solidFill>
-              </a:defRPr>
-            </a:pPr>
-            <a:r>
-              <a:t>  Z_QUOTA_TYPE</a:t>
-            </a:r>
-          </a:p>
-        </p:txBody>
-      </p:sp>
-      <p:sp>
-        <p:nvSpPr>
-          <p:cNvPr id="33" name="TextBox 32"/>
-          <p:cNvSpPr txBox="1"/>
-          <p:nvPr/>
-        </p:nvSpPr>
-        <p:spPr>
-          <a:xfrm>
-            <a:off x="2560320" y="6327648"/>
-            <a:ext cx="274320" cy="201168"/>
-          </a:xfrm>
-          <a:prstGeom prst="rect">
-            <a:avLst/>
-          </a:prstGeom>
-          <a:noFill/>
-        </p:spPr>
-        <p:txBody>
-          <a:bodyPr wrap="none">
-            <a:spAutoFit/>
-          </a:bodyPr>
-          <a:lstStyle/>
-          <a:p>
-            <a:pPr algn="r">
-              <a:defRPr sz="1000">
-                <a:solidFill>
-                  <a:srgbClr val="F38B00"/>
-                </a:solidFill>
-              </a:defRPr>
-            </a:pPr>
-            <a:r>
-              <a:t>⚠</a:t>
-            </a:r>
-          </a:p>
-        </p:txBody>
-      </p:sp>
-      <p:sp>
-        <p:nvSpPr>
-          <p:cNvPr id="34" name="Rounded Rectangle 33"/>
-          <p:cNvSpPr/>
-          <p:nvPr/>
-        </p:nvSpPr>
-        <p:spPr>
-          <a:xfrm>
-            <a:off x="3108960" y="6345936"/>
-            <a:ext cx="2194560" cy="201168"/>
-          </a:xfrm>
-          <a:prstGeom prst="roundRect">
-            <a:avLst/>
-          </a:prstGeom>
-          <a:solidFill>
-            <a:srgbClr val="414141"/>
-          </a:solidFill>
-          <a:ln>
-            <a:solidFill>
-              <a:srgbClr val="787878"/>
-            </a:solidFill>
-          </a:ln>
-        </p:spPr>
-        <p:style>
-          <a:lnRef idx="1">
-            <a:schemeClr val="accent1"/>
-          </a:lnRef>
-          <a:fillRef idx="3">
-            <a:schemeClr val="accent1"/>
-          </a:fillRef>
-          <a:effectRef idx="2">
-            <a:schemeClr val="accent1"/>
-          </a:effectRef>
-          <a:fontRef idx="minor">
-            <a:schemeClr val="lt1"/>
-          </a:fontRef>
-        </p:style>
-        <p:txBody>
-          <a:bodyPr rtlCol="0" anchor="ctr"/>
-          <a:lstStyle/>
-          <a:p>
-            <a:pPr algn="l">
-              <a:defRPr sz="1000">
-                <a:solidFill>
-                  <a:srgbClr val="FFFFFF"/>
-                </a:solidFill>
-              </a:defRPr>
-            </a:pPr>
-            <a:r>
-              <a:t>  QUNUM</a:t>
-            </a:r>
-          </a:p>
-        </p:txBody>
-      </p:sp>
-      <p:sp>
-        <p:nvSpPr>
-          <p:cNvPr id="35" name="TextBox 34"/>
-          <p:cNvSpPr txBox="1"/>
-          <p:nvPr/>
-        </p:nvSpPr>
-        <p:spPr>
-          <a:xfrm>
-            <a:off x="5029200" y="6327648"/>
-            <a:ext cx="274320" cy="201168"/>
-          </a:xfrm>
-          <a:prstGeom prst="rect">
-            <a:avLst/>
-          </a:prstGeom>
-          <a:noFill/>
-        </p:spPr>
-        <p:txBody>
-          <a:bodyPr wrap="none">
-            <a:spAutoFit/>
-          </a:bodyPr>
-          <a:lstStyle/>
-          <a:p>
-            <a:pPr algn="r">
-              <a:defRPr sz="1000">
-                <a:solidFill>
-                  <a:srgbClr val="AAAAAA"/>
-                </a:solidFill>
-              </a:defRPr>
-            </a:pPr>
-            <a:r>
-              <a:t>✔</a:t>
-            </a:r>
-          </a:p>
-        </p:txBody>
-      </p:sp>
-      <p:sp>
-        <p:nvSpPr>
-          <p:cNvPr id="36" name="Rounded Rectangle 35"/>
-          <p:cNvSpPr/>
-          <p:nvPr/>
-        </p:nvSpPr>
-        <p:spPr>
-          <a:xfrm>
-            <a:off x="5943600" y="1645920"/>
-            <a:ext cx="5669280" cy="1005840"/>
-          </a:xfrm>
-          <a:prstGeom prst="roundRect">
-            <a:avLst/>
-          </a:prstGeom>
-          <a:solidFill>
-            <a:srgbClr val="383838"/>
-          </a:solidFill>
-          <a:ln>
-            <a:solidFill>
-              <a:srgbClr val="505050"/>
-            </a:solidFill>
-          </a:ln>
-        </p:spPr>
-        <p:style>
-          <a:lnRef idx="1">
-            <a:schemeClr val="accent1"/>
-          </a:lnRef>
-          <a:fillRef idx="3">
-            <a:schemeClr val="accent1"/>
-          </a:fillRef>
-          <a:effectRef idx="2">
-            <a:schemeClr val="accent1"/>
-          </a:effectRef>
-          <a:fontRef idx="minor">
-            <a:schemeClr val="lt1"/>
-          </a:fontRef>
-        </p:style>
-        <p:txBody>
-          <a:bodyPr rtlCol="0" anchor="ctr"/>
-          <a:lstStyle/>
-          <a:p>
-            <a:pPr algn="ctr"/>
-          </a:p>
-        </p:txBody>
-      </p:sp>
-      <p:sp>
-        <p:nvSpPr>
-          <p:cNvPr id="37" name="TextBox 36"/>
-          <p:cNvSpPr txBox="1"/>
-          <p:nvPr/>
-        </p:nvSpPr>
-        <p:spPr>
-          <a:xfrm>
-            <a:off x="6035040" y="1783080"/>
-            <a:ext cx="731520" cy="731520"/>
-          </a:xfrm>
-          <a:prstGeom prst="rect">
-            <a:avLst/>
-          </a:prstGeom>
-          <a:noFill/>
-        </p:spPr>
-        <p:txBody>
-          <a:bodyPr wrap="none">
-            <a:spAutoFit/>
-          </a:bodyPr>
-          <a:lstStyle/>
-          <a:p>
-            <a:pPr algn="ctr">
-              <a:defRPr sz="2800">
-                <a:solidFill>
-                  <a:srgbClr val="F38B00"/>
-                </a:solidFill>
-              </a:defRPr>
-            </a:pPr>
-            <a:r>
-              <a:t>🤖</a:t>
-            </a:r>
-          </a:p>
-        </p:txBody>
-      </p:sp>
-      <p:sp>
-        <p:nvSpPr>
-          <p:cNvPr id="38" name="TextBox 37"/>
-          <p:cNvSpPr txBox="1"/>
-          <p:nvPr/>
-        </p:nvSpPr>
-        <p:spPr>
-          <a:xfrm>
-            <a:off x="6858000" y="1737360"/>
-            <a:ext cx="4663440" cy="274320"/>
-          </a:xfrm>
-          <a:prstGeom prst="rect">
-            <a:avLst/>
-          </a:prstGeom>
-          <a:noFill/>
-        </p:spPr>
-        <p:txBody>
-          <a:bodyPr wrap="none">
-            <a:spAutoFit/>
-          </a:bodyPr>
-          <a:lstStyle/>
-          <a:p>
-            <a:pPr>
-              <a:defRPr sz="1400" b="1">
-                <a:solidFill>
-                  <a:srgbClr val="FFFFFF"/>
-                </a:solidFill>
-              </a:defRPr>
-            </a:pPr>
-            <a:r>
-              <a:t>概念误导</a:t>
-            </a:r>
-          </a:p>
-        </p:txBody>
-      </p:sp>
-      <p:sp>
-        <p:nvSpPr>
-          <p:cNvPr id="39" name="TextBox 38"/>
-          <p:cNvSpPr txBox="1"/>
-          <p:nvPr/>
-        </p:nvSpPr>
-        <p:spPr>
-          <a:xfrm>
-            <a:off x="6858000" y="2011680"/>
-            <a:ext cx="4572000" cy="548640"/>
-          </a:xfrm>
-          <a:prstGeom prst="rect">
-            <a:avLst/>
-          </a:prstGeom>
-          <a:noFill/>
-        </p:spPr>
-        <p:txBody>
-          <a:bodyPr wrap="square">
-            <a:spAutoFit/>
-          </a:bodyPr>
-          <a:lstStyle/>
-          <a:p>
-            <a:pPr>
-              <a:defRPr sz="1100">
-                <a:solidFill>
-                  <a:srgbClr val="FFFFFF"/>
-                </a:solidFill>
-              </a:defRPr>
-            </a:pPr>
-            <a:r>
-              <a:t>Copilot 完全混淆“配额”与“货源”业务模型，代码完全不可用。</a:t>
-            </a:r>
-          </a:p>
-        </p:txBody>
-      </p:sp>
-      <p:sp>
-        <p:nvSpPr>
-          <p:cNvPr id="40" name="Rounded Rectangle 39"/>
-          <p:cNvSpPr/>
-          <p:nvPr/>
-        </p:nvSpPr>
-        <p:spPr>
-          <a:xfrm>
-            <a:off x="5943600" y="2834640"/>
-            <a:ext cx="5669280" cy="1005840"/>
-          </a:xfrm>
-          <a:prstGeom prst="roundRect">
-            <a:avLst/>
-          </a:prstGeom>
-          <a:solidFill>
-            <a:srgbClr val="383838"/>
-          </a:solidFill>
-          <a:ln>
-            <a:solidFill>
-              <a:srgbClr val="505050"/>
-            </a:solidFill>
-          </a:ln>
-        </p:spPr>
-        <p:style>
-          <a:lnRef idx="1">
-            <a:schemeClr val="accent1"/>
-          </a:lnRef>
-          <a:fillRef idx="3">
-            <a:schemeClr val="accent1"/>
-          </a:fillRef>
-          <a:effectRef idx="2">
-            <a:schemeClr val="accent1"/>
-          </a:effectRef>
-          <a:fontRef idx="minor">
-            <a:schemeClr val="lt1"/>
-          </a:fontRef>
-        </p:style>
-        <p:txBody>
-          <a:bodyPr rtlCol="0" anchor="ctr"/>
-          <a:lstStyle/>
-          <a:p>
-            <a:pPr algn="ctr"/>
-          </a:p>
-        </p:txBody>
-      </p:sp>
-      <p:sp>
-        <p:nvSpPr>
-          <p:cNvPr id="41" name="TextBox 40"/>
-          <p:cNvSpPr txBox="1"/>
-          <p:nvPr/>
-        </p:nvSpPr>
-        <p:spPr>
-          <a:xfrm>
-            <a:off x="6035040" y="2971800"/>
-            <a:ext cx="731520" cy="731520"/>
-          </a:xfrm>
-          <a:prstGeom prst="rect">
-            <a:avLst/>
-          </a:prstGeom>
-          <a:noFill/>
-        </p:spPr>
-        <p:txBody>
-          <a:bodyPr wrap="none">
-            <a:spAutoFit/>
-          </a:bodyPr>
-          <a:lstStyle/>
-          <a:p>
-            <a:pPr algn="ctr">
-              <a:defRPr sz="2800">
-                <a:solidFill>
-                  <a:srgbClr val="F38B00"/>
-                </a:solidFill>
-              </a:defRPr>
-            </a:pPr>
-            <a:r>
-              <a:t>🌩️</a:t>
-            </a:r>
-          </a:p>
-        </p:txBody>
-      </p:sp>
-      <p:sp>
-        <p:nvSpPr>
-          <p:cNvPr id="42" name="TextBox 41"/>
-          <p:cNvSpPr txBox="1"/>
-          <p:nvPr/>
-        </p:nvSpPr>
-        <p:spPr>
-          <a:xfrm>
-            <a:off x="6858000" y="2926080"/>
-            <a:ext cx="4663440" cy="274320"/>
-          </a:xfrm>
-          <a:prstGeom prst="rect">
-            <a:avLst/>
-          </a:prstGeom>
-          <a:noFill/>
-        </p:spPr>
-        <p:txBody>
-          <a:bodyPr wrap="none">
-            <a:spAutoFit/>
-          </a:bodyPr>
-          <a:lstStyle/>
-          <a:p>
-            <a:pPr>
-              <a:defRPr sz="1400" b="1">
-                <a:solidFill>
-                  <a:srgbClr val="FFFFFF"/>
-                </a:solidFill>
-              </a:defRPr>
-            </a:pPr>
-            <a:r>
-              <a:t>严重幻觉</a:t>
-            </a:r>
-          </a:p>
-        </p:txBody>
-      </p:sp>
-      <p:sp>
-        <p:nvSpPr>
-          <p:cNvPr id="43" name="TextBox 42"/>
-          <p:cNvSpPr txBox="1"/>
-          <p:nvPr/>
-        </p:nvSpPr>
-        <p:spPr>
-          <a:xfrm>
-            <a:off x="6858000" y="3200400"/>
-            <a:ext cx="4572000" cy="548640"/>
-          </a:xfrm>
-          <a:prstGeom prst="rect">
-            <a:avLst/>
-          </a:prstGeom>
-          <a:noFill/>
-        </p:spPr>
-        <p:txBody>
-          <a:bodyPr wrap="square">
-            <a:spAutoFit/>
-          </a:bodyPr>
-          <a:lstStyle/>
-          <a:p>
-            <a:pPr>
-              <a:defRPr sz="1100"/>
-            </a:pPr>
-            <a:r>
-              <a:rPr>
-                <a:solidFill>
-                  <a:srgbClr val="FFFFFF"/>
-                </a:solidFill>
-              </a:rPr>
-              <a:t>Claude 虚构 </a:t>
-            </a:r>
-            <a:r>
-              <a:rPr b="1">
-                <a:solidFill>
-                  <a:srgbClr val="F38B00"/>
-                </a:solidFill>
-              </a:rPr>
-              <a:t>9</a:t>
-            </a:r>
-            <a:r>
-              <a:rPr>
-                <a:solidFill>
-                  <a:srgbClr val="FFFFFF"/>
-                </a:solidFill>
-              </a:rPr>
-              <a:t> 处核心字段（占比 </a:t>
-            </a:r>
-            <a:r>
-              <a:rPr b="1">
-                <a:solidFill>
-                  <a:srgbClr val="F38B00"/>
-                </a:solidFill>
-              </a:rPr>
-              <a:t>50%</a:t>
-            </a:r>
-            <a:r>
-              <a:rPr>
-                <a:solidFill>
-                  <a:srgbClr val="FFFFFF"/>
-                </a:solidFill>
-              </a:rPr>
-              <a:t>），引发 </a:t>
-            </a:r>
-            <a:r>
-              <a:rPr b="1">
-                <a:solidFill>
-                  <a:srgbClr val="F38B00"/>
-                </a:solidFill>
-              </a:rPr>
-              <a:t>21</a:t>
-            </a:r>
-            <a:r>
-              <a:rPr>
-                <a:solidFill>
-                  <a:srgbClr val="FFFFFF"/>
-                </a:solidFill>
-              </a:rPr>
-              <a:t> 个连锁语法错误。</a:t>
-            </a:r>
-          </a:p>
-        </p:txBody>
-      </p:sp>
-      <p:sp>
-        <p:nvSpPr>
-          <p:cNvPr id="44" name="Rounded Rectangle 43"/>
-          <p:cNvSpPr/>
-          <p:nvPr/>
-        </p:nvSpPr>
-        <p:spPr>
-          <a:xfrm>
-            <a:off x="5943600" y="4023360"/>
-            <a:ext cx="5669280" cy="1005840"/>
-          </a:xfrm>
-          <a:prstGeom prst="roundRect">
-            <a:avLst/>
-          </a:prstGeom>
-          <a:solidFill>
-            <a:srgbClr val="383838"/>
-          </a:solidFill>
-          <a:ln>
-            <a:solidFill>
-              <a:srgbClr val="505050"/>
-            </a:solidFill>
-          </a:ln>
-        </p:spPr>
-        <p:style>
-          <a:lnRef idx="1">
-            <a:schemeClr val="accent1"/>
-          </a:lnRef>
-          <a:fillRef idx="3">
-            <a:schemeClr val="accent1"/>
-          </a:fillRef>
-          <a:effectRef idx="2">
-            <a:schemeClr val="accent1"/>
-          </a:effectRef>
-          <a:fontRef idx="minor">
-            <a:schemeClr val="lt1"/>
-          </a:fontRef>
-        </p:style>
-        <p:txBody>
-          <a:bodyPr rtlCol="0" anchor="ctr"/>
-          <a:lstStyle/>
-          <a:p>
-            <a:pPr algn="ctr"/>
-          </a:p>
-        </p:txBody>
-      </p:sp>
-      <p:sp>
-        <p:nvSpPr>
-          <p:cNvPr id="45" name="TextBox 44"/>
-          <p:cNvSpPr txBox="1"/>
-          <p:nvPr/>
-        </p:nvSpPr>
-        <p:spPr>
-          <a:xfrm>
-            <a:off x="6035040" y="4160520"/>
-            <a:ext cx="731520" cy="731520"/>
-          </a:xfrm>
-          <a:prstGeom prst="rect">
-            <a:avLst/>
-          </a:prstGeom>
-          <a:noFill/>
-        </p:spPr>
-        <p:txBody>
-          <a:bodyPr wrap="none">
-            <a:spAutoFit/>
-          </a:bodyPr>
-          <a:lstStyle/>
-          <a:p>
-            <a:pPr algn="ctr">
-              <a:defRPr sz="2800">
-                <a:solidFill>
-                  <a:srgbClr val="F38B00"/>
-                </a:solidFill>
-              </a:defRPr>
-            </a:pPr>
-            <a:r>
-              <a:t>🔒</a:t>
-            </a:r>
-          </a:p>
-        </p:txBody>
-      </p:sp>
-      <p:sp>
-        <p:nvSpPr>
-          <p:cNvPr id="46" name="TextBox 45"/>
-          <p:cNvSpPr txBox="1"/>
-          <p:nvPr/>
-        </p:nvSpPr>
-        <p:spPr>
-          <a:xfrm>
-            <a:off x="6858000" y="4114800"/>
-            <a:ext cx="4663440" cy="274320"/>
-          </a:xfrm>
-          <a:prstGeom prst="rect">
-            <a:avLst/>
-          </a:prstGeom>
-          <a:noFill/>
-        </p:spPr>
-        <p:txBody>
-          <a:bodyPr wrap="none">
-            <a:spAutoFit/>
-          </a:bodyPr>
-          <a:lstStyle/>
-          <a:p>
-            <a:pPr>
-              <a:defRPr sz="1400" b="1">
-                <a:solidFill>
-                  <a:srgbClr val="FFFFFF"/>
-                </a:solidFill>
-              </a:defRPr>
-            </a:pPr>
-            <a:r>
-              <a:t>接口违规</a:t>
-            </a:r>
-          </a:p>
-        </p:txBody>
-      </p:sp>
-      <p:sp>
-        <p:nvSpPr>
-          <p:cNvPr id="47" name="TextBox 46"/>
-          <p:cNvSpPr txBox="1"/>
-          <p:nvPr/>
-        </p:nvSpPr>
-        <p:spPr>
-          <a:xfrm>
-            <a:off x="6858000" y="4389120"/>
-            <a:ext cx="4572000" cy="548640"/>
-          </a:xfrm>
-          <a:prstGeom prst="rect">
-            <a:avLst/>
-          </a:prstGeom>
-          <a:noFill/>
-        </p:spPr>
-        <p:txBody>
-          <a:bodyPr wrap="square">
-            <a:spAutoFit/>
-          </a:bodyPr>
-          <a:lstStyle/>
-          <a:p>
-            <a:pPr>
-              <a:defRPr sz="1100">
-                <a:solidFill>
-                  <a:srgbClr val="FFFFFF"/>
-                </a:solidFill>
-              </a:defRPr>
-            </a:pPr>
-            <a:r>
-              <a:t>AI 无法识别 SAP FM 接口必须使用 DDIC 类型的强制规则。</a:t>
-            </a:r>
-          </a:p>
-        </p:txBody>
-      </p:sp>
-      <p:sp>
-        <p:nvSpPr>
-          <p:cNvPr id="48" name="Rounded Rectangle 47"/>
-          <p:cNvSpPr/>
-          <p:nvPr/>
-        </p:nvSpPr>
-        <p:spPr>
-          <a:xfrm>
-            <a:off x="5943600" y="5212080"/>
-            <a:ext cx="5669280" cy="1005840"/>
-          </a:xfrm>
-          <a:prstGeom prst="roundRect">
-            <a:avLst/>
-          </a:prstGeom>
-          <a:solidFill>
-            <a:srgbClr val="383838"/>
-          </a:solidFill>
-          <a:ln>
-            <a:solidFill>
-              <a:srgbClr val="505050"/>
-            </a:solidFill>
-          </a:ln>
-        </p:spPr>
-        <p:style>
-          <a:lnRef idx="1">
-            <a:schemeClr val="accent1"/>
-          </a:lnRef>
-          <a:fillRef idx="3">
-            <a:schemeClr val="accent1"/>
-          </a:fillRef>
-          <a:effectRef idx="2">
-            <a:schemeClr val="accent1"/>
-          </a:effectRef>
-          <a:fontRef idx="minor">
-            <a:schemeClr val="lt1"/>
-          </a:fontRef>
-        </p:style>
-        <p:txBody>
-          <a:bodyPr rtlCol="0" anchor="ctr"/>
-          <a:lstStyle/>
-          <a:p>
-            <a:pPr algn="ctr"/>
-          </a:p>
-        </p:txBody>
-      </p:sp>
-      <p:sp>
-        <p:nvSpPr>
-          <p:cNvPr id="49" name="TextBox 48"/>
-          <p:cNvSpPr txBox="1"/>
-          <p:nvPr/>
-        </p:nvSpPr>
-        <p:spPr>
-          <a:xfrm>
-            <a:off x="6035040" y="5349240"/>
-            <a:ext cx="731520" cy="731520"/>
-          </a:xfrm>
-          <a:prstGeom prst="rect">
-            <a:avLst/>
-          </a:prstGeom>
-          <a:noFill/>
-        </p:spPr>
-        <p:txBody>
-          <a:bodyPr wrap="none">
-            <a:spAutoFit/>
-          </a:bodyPr>
-          <a:lstStyle/>
-          <a:p>
-            <a:pPr algn="ctr">
-              <a:defRPr sz="2800">
-                <a:solidFill>
-                  <a:srgbClr val="F38B00"/>
-                </a:solidFill>
-              </a:defRPr>
-            </a:pPr>
-            <a:r>
-              <a:t>⏱️</a:t>
-            </a:r>
-          </a:p>
-        </p:txBody>
-      </p:sp>
-      <p:sp>
-        <p:nvSpPr>
-          <p:cNvPr id="50" name="TextBox 49"/>
-          <p:cNvSpPr txBox="1"/>
-          <p:nvPr/>
-        </p:nvSpPr>
-        <p:spPr>
-          <a:xfrm>
-            <a:off x="6858000" y="5303520"/>
-            <a:ext cx="4663440" cy="274320"/>
-          </a:xfrm>
-          <a:prstGeom prst="rect">
-            <a:avLst/>
-          </a:prstGeom>
-          <a:noFill/>
-        </p:spPr>
-        <p:txBody>
-          <a:bodyPr wrap="none">
-            <a:spAutoFit/>
-          </a:bodyPr>
-          <a:lstStyle/>
-          <a:p>
-            <a:pPr>
-              <a:defRPr sz="1400" b="1">
-                <a:solidFill>
-                  <a:srgbClr val="FFFFFF"/>
-                </a:solidFill>
-              </a:defRPr>
-            </a:pPr>
-            <a:r>
-              <a:t>效率停滞</a:t>
-            </a:r>
-          </a:p>
-        </p:txBody>
-      </p:sp>
-      <p:sp>
-        <p:nvSpPr>
-          <p:cNvPr id="51" name="TextBox 50"/>
-          <p:cNvSpPr txBox="1"/>
-          <p:nvPr/>
-        </p:nvSpPr>
-        <p:spPr>
-          <a:xfrm>
-            <a:off x="6858000" y="5577840"/>
-            <a:ext cx="4572000" cy="548640"/>
-          </a:xfrm>
-          <a:prstGeom prst="rect">
-            <a:avLst/>
-          </a:prstGeom>
-          <a:noFill/>
-        </p:spPr>
-        <p:txBody>
-          <a:bodyPr wrap="square">
-            <a:spAutoFit/>
-          </a:bodyPr>
-          <a:lstStyle/>
-          <a:p>
-            <a:pPr>
-              <a:defRPr sz="1100">
-                <a:solidFill>
-                  <a:srgbClr val="FFFFFF"/>
-                </a:solidFill>
-              </a:defRPr>
-            </a:pPr>
-            <a:r>
-              <a:t>修正幻觉字段与重写逻辑的成本已抵消 AI 生成的便利。</a:t>
-            </a:r>
-          </a:p>
-        </p:txBody>
-      </p:sp>
-      <p:sp>
-        <p:nvSpPr>
-          <p:cNvPr id="52" name="TextBox 51"/>
-          <p:cNvSpPr txBox="1"/>
-          <p:nvPr/>
-        </p:nvSpPr>
-        <p:spPr>
-          <a:xfrm>
-            <a:off x="11430000" y="6400800"/>
-            <a:ext cx="548640" cy="365760"/>
-          </a:xfrm>
-          <a:prstGeom prst="rect">
-            <a:avLst/>
-          </a:prstGeom>
-          <a:noFill/>
-        </p:spPr>
-        <p:txBody>
-          <a:bodyPr wrap="none">
-            <a:spAutoFit/>
-          </a:bodyPr>
-          <a:lstStyle/>
-          <a:p>
-            <a:pPr algn="r">
-              <a:defRPr sz="1200">
-                <a:solidFill>
-                  <a:srgbClr val="AAAAAA"/>
-                </a:solidFill>
-              </a:defRPr>
-            </a:pPr>
-            <a:r>
-              <a:t>2/4</a:t>
+              <a:t>PAGE 2 OF 4</a:t>
             </a:r>
           </a:p>
         </p:txBody>
